--- a/assets/figures-editable/c3-c4/c4-e32.pptx
+++ b/assets/figures-editable/c3-c4/c4-e32.pptx
@@ -3104,8 +3104,8 @@
         </p:nvSpPr>
         <p:spPr>
           <a:xfrm>
-            <a:off x="274320" y="137160"/>
-            <a:ext cx="11612880" cy="365760"/>
+            <a:off x="274320" y="118872"/>
+            <a:ext cx="11612880" cy="340105"/>
           </a:xfrm>
           <a:prstGeom prst="rect">
             <a:avLst/>
@@ -3114,7 +3114,7 @@
           <a:effectLst/>
         </p:spPr>
         <p:txBody>
-          <a:bodyPr wrap="square" lIns="27432" rIns="27432" tIns="18288" bIns="18288" anchor="ctr">
+          <a:bodyPr wrap="none" lIns="18288" rIns="18288" tIns="18288" bIns="18288" anchor="t">
             <a:spAutoFit/>
           </a:bodyPr>
           <a:lstStyle/>
@@ -3125,7 +3125,7 @@
               </a:spcAft>
             </a:pPr>
             <a:r>
-              <a:rPr sz="2100" b="0" i="0">
+              <a:rPr sz="1900" b="1" i="0">
                 <a:solidFill>
                   <a:srgbClr val="8EDBD4"/>
                 </a:solidFill>
@@ -3138,21 +3138,58 @@
       </p:sp>
       <p:sp>
         <p:nvSpPr>
-          <p:cNvPr id="3" name="C4-E32 rect 1" descr="sci-ppt:o001"/>
-          <p:cNvSpPr/>
+          <p:cNvPr id="3" name="C4-E32 text 1" descr="sci-ppt:o001"/>
+          <p:cNvSpPr txBox="1"/>
           <p:nvPr/>
         </p:nvSpPr>
         <p:spPr>
           <a:xfrm>
-            <a:off x="594360" y="1417320"/>
-            <a:ext cx="3200400" cy="1325880"/>
+            <a:off x="457200" y="914400"/>
+            <a:ext cx="11247120" cy="254889"/>
           </a:xfrm>
           <a:prstGeom prst="rect">
             <a:avLst/>
           </a:prstGeom>
-          <a:solidFill>
-            <a:srgbClr val="213E4B"/>
-          </a:solidFill>
+          <a:noFill/>
+          <a:effectLst/>
+        </p:spPr>
+        <p:txBody>
+          <a:bodyPr wrap="none" lIns="18288" rIns="18288" tIns="18288" bIns="18288" anchor="t">
+            <a:spAutoFit/>
+          </a:bodyPr>
+          <a:lstStyle/>
+          <a:p>
+            <a:pPr algn="l">
+              <a:spcAft>
+                <a:spcPts val="0"/>
+              </a:spcAft>
+            </a:pPr>
+            <a:r>
+              <a:rPr sz="1350" b="1" i="0">
+                <a:solidFill>
+                  <a:srgbClr val="8EDBD4"/>
+                </a:solidFill>
+                <a:latin typeface="Arial"/>
+              </a:rPr>
+              <a:t>Passed screens for Γ = 0.005 J/m² and v_f = 0.50 m/s</a:t>
+            </a:r>
+          </a:p>
+        </p:txBody>
+      </p:sp>
+      <p:cxnSp>
+        <p:nvCxnSpPr>
+          <p:cNvPr id="4" name="C4-E32 line 2" descr="sci-ppt:o002"/>
+          <p:cNvCxnSpPr/>
+          <p:nvPr/>
+        </p:nvCxnSpPr>
+        <p:spPr>
+          <a:xfrm>
+            <a:off x="457200" y="4572000"/>
+            <a:ext cx="5669280" cy="0"/>
+          </a:xfrm>
+          <a:prstGeom prst="line">
+            <a:avLst/>
+          </a:prstGeom>
           <a:ln w="19050">
             <a:solidFill>
               <a:srgbClr val="B4C7D2"/>
@@ -3160,95 +3197,21 @@
           </a:ln>
           <a:effectLst/>
         </p:spPr>
-        <p:txBody>
-          <a:bodyPr rtlCol="0" anchor="ctr"/>
-          <a:lstStyle/>
-          <a:p>
-            <a:pPr algn="ctr"/>
-          </a:p>
-        </p:txBody>
-      </p:sp>
-      <p:sp>
-        <p:nvSpPr>
-          <p:cNvPr id="4" name="C4-E32 text 2" descr="sci-ppt:o002"/>
-          <p:cNvSpPr txBox="1"/>
-          <p:nvPr/>
-        </p:nvSpPr>
-        <p:spPr>
-          <a:xfrm>
-            <a:off x="758952" y="1627632"/>
-            <a:ext cx="2871216" cy="914400"/>
-          </a:xfrm>
-          <a:prstGeom prst="rect">
-            <a:avLst/>
-          </a:prstGeom>
-          <a:noFill/>
-          <a:effectLst/>
-        </p:spPr>
-        <p:txBody>
-          <a:bodyPr wrap="square" lIns="27432" rIns="27432" tIns="18288" bIns="18288" anchor="ctr">
-            <a:spAutoFit/>
-          </a:bodyPr>
-          <a:lstStyle/>
-          <a:p>
-            <a:pPr algn="l">
-              <a:spcAft>
-                <a:spcPts val="0"/>
-              </a:spcAft>
-            </a:pPr>
-            <a:r>
-              <a:rPr sz="1800" b="0" i="0">
-                <a:solidFill>
-                  <a:srgbClr val="E7F0F3"/>
-                </a:solidFill>
-                <a:latin typeface="Arial"/>
-              </a:rPr>
-              <a:t>Incoming finite budgets</a:t>
-            </a:r>
-          </a:p>
-        </p:txBody>
-      </p:sp>
+      </p:cxnSp>
       <p:cxnSp>
         <p:nvCxnSpPr>
-          <p:cNvPr id="5" name="C4-E32 arrow 3" descr="sci-ppt:o003"/>
+          <p:cNvPr id="5" name="C4-E32 line 3" descr="sci-ppt:o003"/>
           <p:cNvCxnSpPr/>
           <p:nvPr/>
         </p:nvCxnSpPr>
         <p:spPr>
           <a:xfrm>
-            <a:off x="3794760" y="2057400"/>
-            <a:ext cx="640080" cy="0"/>
+            <a:off x="457200" y="1554480"/>
+            <a:ext cx="0" cy="3017520"/>
           </a:xfrm>
           <a:prstGeom prst="line">
             <a:avLst/>
           </a:prstGeom>
-          <a:ln w="25400">
-            <a:solidFill>
-              <a:srgbClr val="8EDBD4"/>
-            </a:solidFill>
-            <a:headEnd type="none" w="med" len="med"/>
-            <a:tailEnd type="triangle" w="med" len="med"/>
-          </a:ln>
-          <a:effectLst/>
-        </p:spPr>
-      </p:cxnSp>
-      <p:sp>
-        <p:nvSpPr>
-          <p:cNvPr id="6" name="C4-E32 rect 4" descr="sci-ppt:o004"/>
-          <p:cNvSpPr/>
-          <p:nvPr/>
-        </p:nvSpPr>
-        <p:spPr>
-          <a:xfrm>
-            <a:off x="4480560" y="1417320"/>
-            <a:ext cx="3200400" cy="1325880"/>
-          </a:xfrm>
-          <a:prstGeom prst="rect">
-            <a:avLst/>
-          </a:prstGeom>
-          <a:solidFill>
-            <a:srgbClr val="213E4B"/>
-          </a:solidFill>
           <a:ln w="19050">
             <a:solidFill>
               <a:srgbClr val="B4C7D2"/>
@@ -3256,24 +3219,61 @@
           </a:ln>
           <a:effectLst/>
         </p:spPr>
-        <p:txBody>
-          <a:bodyPr rtlCol="0" anchor="ctr"/>
-          <a:lstStyle/>
-          <a:p>
-            <a:pPr algn="ctr"/>
-          </a:p>
-        </p:txBody>
-      </p:sp>
-      <p:sp>
-        <p:nvSpPr>
-          <p:cNvPr id="7" name="C4-E32 text 5" descr="sci-ppt:o005"/>
+      </p:cxnSp>
+      <p:cxnSp>
+        <p:nvCxnSpPr>
+          <p:cNvPr id="6" name="C4-E32 line 4" descr="sci-ppt:o004"/>
+          <p:cNvCxnSpPr/>
+          <p:nvPr/>
+        </p:nvCxnSpPr>
+        <p:spPr>
+          <a:xfrm>
+            <a:off x="393192" y="4572000"/>
+            <a:ext cx="64008" cy="0"/>
+          </a:xfrm>
+          <a:prstGeom prst="line">
+            <a:avLst/>
+          </a:prstGeom>
+          <a:ln w="12700">
+            <a:solidFill>
+              <a:srgbClr val="B4C7D2"/>
+            </a:solidFill>
+          </a:ln>
+          <a:effectLst/>
+        </p:spPr>
+      </p:cxnSp>
+      <p:cxnSp>
+        <p:nvCxnSpPr>
+          <p:cNvPr id="7" name="C4-E32 line 5" descr="sci-ppt:o005"/>
+          <p:cNvCxnSpPr/>
+          <p:nvPr/>
+        </p:nvCxnSpPr>
+        <p:spPr>
+          <a:xfrm>
+            <a:off x="457200" y="4572000"/>
+            <a:ext cx="5669280" cy="0"/>
+          </a:xfrm>
+          <a:prstGeom prst="line">
+            <a:avLst/>
+          </a:prstGeom>
+          <a:ln w="7620">
+            <a:solidFill>
+              <a:srgbClr val="2E4756"/>
+            </a:solidFill>
+          </a:ln>
+          <a:effectLst/>
+        </p:spPr>
+      </p:cxnSp>
+      <p:sp>
+        <p:nvSpPr>
+          <p:cNvPr id="8" name="C4-E32 text 6" descr="sci-ppt:o006"/>
           <p:cNvSpPr txBox="1"/>
           <p:nvPr/>
         </p:nvSpPr>
         <p:spPr>
           <a:xfrm>
-            <a:off x="4645152" y="1627632"/>
-            <a:ext cx="2871216" cy="914400"/>
+            <a:off x="-411479" y="4489704"/>
+            <a:ext cx="777240" cy="208407"/>
           </a:xfrm>
           <a:prstGeom prst="rect">
             <a:avLst/>
@@ -3282,94 +3282,82 @@
           <a:effectLst/>
         </p:spPr>
         <p:txBody>
-          <a:bodyPr wrap="square" lIns="27432" rIns="27432" tIns="18288" bIns="18288" anchor="ctr">
+          <a:bodyPr wrap="none" lIns="18288" rIns="18288" tIns="18288" bIns="18288" anchor="t">
             <a:spAutoFit/>
           </a:bodyPr>
           <a:lstStyle/>
           <a:p>
-            <a:pPr algn="l">
+            <a:pPr algn="r">
               <a:spcAft>
                 <a:spcPts val="0"/>
               </a:spcAft>
             </a:pPr>
             <a:r>
-              <a:rPr sz="1800" b="0" i="0">
+              <a:rPr sz="1050" b="0" i="0">
                 <a:solidFill>
-                  <a:srgbClr val="E7F0F3"/>
+                  <a:srgbClr val="B4C7D2"/>
                 </a:solidFill>
                 <a:latin typeface="Arial"/>
               </a:rPr>
-              <a:t>Transmitted E_solid, I_net</a:t>
+              <a:t>0</a:t>
             </a:r>
           </a:p>
         </p:txBody>
       </p:sp>
       <p:cxnSp>
         <p:nvCxnSpPr>
-          <p:cNvPr id="8" name="C4-E32 arrow 6" descr="sci-ppt:o006"/>
+          <p:cNvPr id="9" name="C4-E32 line 7" descr="sci-ppt:o007"/>
           <p:cNvCxnSpPr/>
           <p:nvPr/>
         </p:nvCxnSpPr>
         <p:spPr>
           <a:xfrm>
-            <a:off x="7680960" y="2057400"/>
-            <a:ext cx="640080" cy="0"/>
+            <a:off x="393192" y="3200400"/>
+            <a:ext cx="64008" cy="0"/>
           </a:xfrm>
           <a:prstGeom prst="line">
             <a:avLst/>
           </a:prstGeom>
-          <a:ln w="25400">
-            <a:solidFill>
-              <a:srgbClr val="8EDBD4"/>
-            </a:solidFill>
-            <a:headEnd type="none" w="med" len="med"/>
-            <a:tailEnd type="triangle" w="med" len="med"/>
-          </a:ln>
-          <a:effectLst/>
-        </p:spPr>
-      </p:cxnSp>
-      <p:sp>
-        <p:nvSpPr>
-          <p:cNvPr id="9" name="C4-E32 rect 7" descr="sci-ppt:o007"/>
-          <p:cNvSpPr/>
-          <p:nvPr/>
-        </p:nvSpPr>
-        <p:spPr>
-          <a:xfrm>
-            <a:off x="8366760" y="1417320"/>
-            <a:ext cx="3200400" cy="1325880"/>
-          </a:xfrm>
-          <a:prstGeom prst="rect">
-            <a:avLst/>
-          </a:prstGeom>
-          <a:solidFill>
-            <a:srgbClr val="213E4B"/>
-          </a:solidFill>
-          <a:ln w="19050">
+          <a:ln w="12700">
             <a:solidFill>
               <a:srgbClr val="B4C7D2"/>
             </a:solidFill>
           </a:ln>
           <a:effectLst/>
         </p:spPr>
-        <p:txBody>
-          <a:bodyPr rtlCol="0" anchor="ctr"/>
-          <a:lstStyle/>
-          <a:p>
-            <a:pPr algn="ctr"/>
-          </a:p>
-        </p:txBody>
-      </p:sp>
-      <p:sp>
-        <p:nvSpPr>
-          <p:cNvPr id="10" name="C4-E32 text 8" descr="sci-ppt:o008"/>
+      </p:cxnSp>
+      <p:cxnSp>
+        <p:nvCxnSpPr>
+          <p:cNvPr id="10" name="C4-E32 line 8" descr="sci-ppt:o008"/>
+          <p:cNvCxnSpPr/>
+          <p:nvPr/>
+        </p:nvCxnSpPr>
+        <p:spPr>
+          <a:xfrm>
+            <a:off x="457200" y="3200400"/>
+            <a:ext cx="5669280" cy="0"/>
+          </a:xfrm>
+          <a:prstGeom prst="line">
+            <a:avLst/>
+          </a:prstGeom>
+          <a:ln w="7620">
+            <a:solidFill>
+              <a:srgbClr val="2E4756"/>
+            </a:solidFill>
+          </a:ln>
+          <a:effectLst/>
+        </p:spPr>
+      </p:cxnSp>
+      <p:sp>
+        <p:nvSpPr>
+          <p:cNvPr id="11" name="C4-E32 text 9" descr="sci-ppt:o009"/>
           <p:cNvSpPr txBox="1"/>
           <p:nvPr/>
         </p:nvSpPr>
         <p:spPr>
           <a:xfrm>
-            <a:off x="8531352" y="1627632"/>
-            <a:ext cx="2871216" cy="914400"/>
+            <a:off x="-411479" y="3118104"/>
+            <a:ext cx="777240" cy="208407"/>
           </a:xfrm>
           <a:prstGeom prst="rect">
             <a:avLst/>
@@ -3378,64 +3366,24 @@
           <a:effectLst/>
         </p:spPr>
         <p:txBody>
-          <a:bodyPr wrap="square" lIns="27432" rIns="27432" tIns="18288" bIns="18288" anchor="ctr">
+          <a:bodyPr wrap="none" lIns="18288" rIns="18288" tIns="18288" bIns="18288" anchor="t">
             <a:spAutoFit/>
           </a:bodyPr>
           <a:lstStyle/>
           <a:p>
-            <a:pPr algn="l">
+            <a:pPr algn="r">
               <a:spcAft>
                 <a:spcPts val="0"/>
               </a:spcAft>
             </a:pPr>
             <a:r>
-              <a:rPr sz="1800" b="0" i="0">
+              <a:rPr sz="1050" b="0" i="0">
                 <a:solidFill>
-                  <a:srgbClr val="E7F0F3"/>
+                  <a:srgbClr val="B4C7D2"/>
                 </a:solidFill>
                 <a:latin typeface="Arial"/>
               </a:rPr>
-              <a:t>Release + departure cost</a:t>
-            </a:r>
-          </a:p>
-        </p:txBody>
-      </p:sp>
-      <p:sp>
-        <p:nvSpPr>
-          <p:cNvPr id="11" name="C4-E32 text 9" descr="sci-ppt:o009"/>
-          <p:cNvSpPr txBox="1"/>
-          <p:nvPr/>
-        </p:nvSpPr>
-        <p:spPr>
-          <a:xfrm>
-            <a:off x="731520" y="3246120"/>
-            <a:ext cx="10789920" cy="457200"/>
-          </a:xfrm>
-          <a:prstGeom prst="rect">
-            <a:avLst/>
-          </a:prstGeom>
-          <a:noFill/>
-          <a:effectLst/>
-        </p:spPr>
-        <p:txBody>
-          <a:bodyPr wrap="square" lIns="27432" rIns="27432" tIns="18288" bIns="18288" anchor="ctr">
-            <a:spAutoFit/>
-          </a:bodyPr>
-          <a:lstStyle/>
-          <a:p>
-            <a:pPr algn="l">
-              <a:spcAft>
-                <a:spcPts val="0"/>
-              </a:spcAft>
-            </a:pPr>
-            <a:r>
-              <a:rPr sz="1800" b="0" i="0">
-                <a:solidFill>
-                  <a:srgbClr val="8EDBD4"/>
-                </a:solidFill>
-                <a:latin typeface="Arial"/>
-              </a:rPr>
-              <a:t>Work, storage, fracture consumption and net impulse retain separate meanings.</a:t>
+              <a:t>5</a:t>
             </a:r>
           </a:p>
         </p:txBody>
@@ -3448,30 +3396,52 @@
         </p:nvCxnSpPr>
         <p:spPr>
           <a:xfrm>
-            <a:off x="274320" y="3977639"/>
-            <a:ext cx="11612880" cy="0"/>
+            <a:off x="393192" y="1828800"/>
+            <a:ext cx="64008" cy="0"/>
           </a:xfrm>
           <a:prstGeom prst="line">
             <a:avLst/>
           </a:prstGeom>
           <a:ln w="12700">
             <a:solidFill>
-              <a:srgbClr val="405967"/>
+              <a:srgbClr val="B4C7D2"/>
             </a:solidFill>
           </a:ln>
           <a:effectLst/>
         </p:spPr>
       </p:cxnSp>
-      <p:sp>
-        <p:nvSpPr>
-          <p:cNvPr id="13" name="C4-E32 text 11" descr="sci-ppt:o011"/>
+      <p:cxnSp>
+        <p:nvCxnSpPr>
+          <p:cNvPr id="13" name="C4-E32 line 11" descr="sci-ppt:o011"/>
+          <p:cNvCxnSpPr/>
+          <p:nvPr/>
+        </p:nvCxnSpPr>
+        <p:spPr>
+          <a:xfrm>
+            <a:off x="457200" y="1828800"/>
+            <a:ext cx="5669280" cy="0"/>
+          </a:xfrm>
+          <a:prstGeom prst="line">
+            <a:avLst/>
+          </a:prstGeom>
+          <a:ln w="7620">
+            <a:solidFill>
+              <a:srgbClr val="2E4756"/>
+            </a:solidFill>
+          </a:ln>
+          <a:effectLst/>
+        </p:spPr>
+      </p:cxnSp>
+      <p:sp>
+        <p:nvSpPr>
+          <p:cNvPr id="14" name="C4-E32 text 12" descr="sci-ppt:o012"/>
           <p:cNvSpPr txBox="1"/>
           <p:nvPr/>
         </p:nvSpPr>
         <p:spPr>
           <a:xfrm>
-            <a:off x="320040" y="4096512"/>
-            <a:ext cx="5715000" cy="246888"/>
+            <a:off x="-411479" y="1746504"/>
+            <a:ext cx="777240" cy="208407"/>
           </a:xfrm>
           <a:prstGeom prst="rect">
             <a:avLst/>
@@ -3480,7 +3450,395 @@
           <a:effectLst/>
         </p:spPr>
         <p:txBody>
-          <a:bodyPr wrap="square" lIns="27432" rIns="27432" tIns="18288" bIns="18288" anchor="ctr">
+          <a:bodyPr wrap="none" lIns="18288" rIns="18288" tIns="18288" bIns="18288" anchor="t">
+            <a:spAutoFit/>
+          </a:bodyPr>
+          <a:lstStyle/>
+          <a:p>
+            <a:pPr algn="r">
+              <a:spcAft>
+                <a:spcPts val="0"/>
+              </a:spcAft>
+            </a:pPr>
+            <a:r>
+              <a:rPr sz="1050" b="0" i="0">
+                <a:solidFill>
+                  <a:srgbClr val="B4C7D2"/>
+                </a:solidFill>
+                <a:latin typeface="Arial"/>
+              </a:rPr>
+              <a:t>10</a:t>
+            </a:r>
+          </a:p>
+        </p:txBody>
+      </p:sp>
+      <p:sp>
+        <p:nvSpPr>
+          <p:cNvPr id="15" name="C4-E32 rect 13" descr="sci-ppt:o013"/>
+          <p:cNvSpPr/>
+          <p:nvPr/>
+        </p:nvSpPr>
+        <p:spPr>
+          <a:xfrm>
+            <a:off x="721766" y="3200400"/>
+            <a:ext cx="1360627" cy="1371600"/>
+          </a:xfrm>
+          <a:prstGeom prst="rect">
+            <a:avLst/>
+          </a:prstGeom>
+          <a:solidFill>
+            <a:srgbClr val="8EDBD4">
+              <a:alpha val="85000"/>
+            </a:srgbClr>
+          </a:solidFill>
+          <a:ln w="12700">
+            <a:solidFill>
+              <a:srgbClr val="8EDBD4">
+                <a:alpha val="85000"/>
+              </a:srgbClr>
+            </a:solidFill>
+          </a:ln>
+          <a:effectLst/>
+        </p:spPr>
+        <p:txBody>
+          <a:bodyPr rtlCol="0" anchor="ctr"/>
+          <a:lstStyle/>
+          <a:p>
+            <a:pPr algn="ctr"/>
+          </a:p>
+        </p:txBody>
+      </p:sp>
+      <p:sp>
+        <p:nvSpPr>
+          <p:cNvPr id="16" name="C4-E32 text 14" descr="sci-ppt:o014"/>
+          <p:cNvSpPr txBox="1"/>
+          <p:nvPr/>
+        </p:nvSpPr>
+        <p:spPr>
+          <a:xfrm>
+            <a:off x="493166" y="2926080"/>
+            <a:ext cx="1817827" cy="223900"/>
+          </a:xfrm>
+          <a:prstGeom prst="rect">
+            <a:avLst/>
+          </a:prstGeom>
+          <a:noFill/>
+          <a:effectLst/>
+        </p:spPr>
+        <p:txBody>
+          <a:bodyPr wrap="none" lIns="18288" rIns="18288" tIns="18288" bIns="18288" anchor="t">
+            <a:spAutoFit/>
+          </a:bodyPr>
+          <a:lstStyle/>
+          <a:p>
+            <a:pPr algn="ctr">
+              <a:spcAft>
+                <a:spcPts val="0"/>
+              </a:spcAft>
+            </a:pPr>
+            <a:r>
+              <a:rPr sz="1150" b="1" i="0">
+                <a:solidFill>
+                  <a:srgbClr val="E7F0F3"/>
+                </a:solidFill>
+                <a:latin typeface="Arial"/>
+              </a:rPr>
+              <a:t>5.000</a:t>
+            </a:r>
+          </a:p>
+        </p:txBody>
+      </p:sp>
+      <p:sp>
+        <p:nvSpPr>
+          <p:cNvPr id="17" name="C4-E32 text 15" descr="sci-ppt:o015"/>
+          <p:cNvSpPr txBox="1"/>
+          <p:nvPr/>
+        </p:nvSpPr>
+        <p:spPr>
+          <a:xfrm>
+            <a:off x="447446" y="4645152"/>
+            <a:ext cx="1909267" cy="216153"/>
+          </a:xfrm>
+          <a:prstGeom prst="rect">
+            <a:avLst/>
+          </a:prstGeom>
+          <a:noFill/>
+          <a:effectLst/>
+        </p:spPr>
+        <p:txBody>
+          <a:bodyPr wrap="none" lIns="18288" rIns="18288" tIns="18288" bIns="18288" anchor="t">
+            <a:spAutoFit/>
+          </a:bodyPr>
+          <a:lstStyle/>
+          <a:p>
+            <a:pPr algn="ctr">
+              <a:spcAft>
+                <a:spcPts val="0"/>
+              </a:spcAft>
+            </a:pPr>
+            <a:r>
+              <a:rPr sz="1100" b="0" i="0">
+                <a:solidFill>
+                  <a:srgbClr val="B4C7D2"/>
+                </a:solidFill>
+                <a:latin typeface="Arial"/>
+              </a:rPr>
+              <a:t>Γ A_f</a:t>
+            </a:r>
+          </a:p>
+        </p:txBody>
+      </p:sp>
+      <p:sp>
+        <p:nvSpPr>
+          <p:cNvPr id="18" name="C4-E32 rect 16" descr="sci-ppt:o016"/>
+          <p:cNvSpPr/>
+          <p:nvPr/>
+        </p:nvSpPr>
+        <p:spPr>
+          <a:xfrm>
+            <a:off x="2611526" y="3120504"/>
+            <a:ext cx="1360627" cy="79895"/>
+          </a:xfrm>
+          <a:prstGeom prst="rect">
+            <a:avLst/>
+          </a:prstGeom>
+          <a:solidFill>
+            <a:srgbClr val="7FC8F8">
+              <a:alpha val="85000"/>
+            </a:srgbClr>
+          </a:solidFill>
+          <a:ln w="12700">
+            <a:solidFill>
+              <a:srgbClr val="7FC8F8">
+                <a:alpha val="85000"/>
+              </a:srgbClr>
+            </a:solidFill>
+          </a:ln>
+          <a:effectLst/>
+        </p:spPr>
+        <p:txBody>
+          <a:bodyPr rtlCol="0" anchor="ctr"/>
+          <a:lstStyle/>
+          <a:p>
+            <a:pPr algn="ctr"/>
+          </a:p>
+        </p:txBody>
+      </p:sp>
+      <p:sp>
+        <p:nvSpPr>
+          <p:cNvPr id="19" name="C4-E32 text 17" descr="sci-ppt:o017"/>
+          <p:cNvSpPr txBox="1"/>
+          <p:nvPr/>
+        </p:nvSpPr>
+        <p:spPr>
+          <a:xfrm>
+            <a:off x="2382926" y="2846184"/>
+            <a:ext cx="1817827" cy="223900"/>
+          </a:xfrm>
+          <a:prstGeom prst="rect">
+            <a:avLst/>
+          </a:prstGeom>
+          <a:noFill/>
+          <a:effectLst/>
+        </p:spPr>
+        <p:txBody>
+          <a:bodyPr wrap="none" lIns="18288" rIns="18288" tIns="18288" bIns="18288" anchor="t">
+            <a:spAutoFit/>
+          </a:bodyPr>
+          <a:lstStyle/>
+          <a:p>
+            <a:pPr algn="ctr">
+              <a:spcAft>
+                <a:spcPts val="0"/>
+              </a:spcAft>
+            </a:pPr>
+            <a:r>
+              <a:rPr sz="1150" b="1" i="0">
+                <a:solidFill>
+                  <a:srgbClr val="E7F0F3"/>
+                </a:solidFill>
+                <a:latin typeface="Arial"/>
+              </a:rPr>
+              <a:t>+0.291</a:t>
+            </a:r>
+          </a:p>
+        </p:txBody>
+      </p:sp>
+      <p:sp>
+        <p:nvSpPr>
+          <p:cNvPr id="20" name="C4-E32 text 18" descr="sci-ppt:o018"/>
+          <p:cNvSpPr txBox="1"/>
+          <p:nvPr/>
+        </p:nvSpPr>
+        <p:spPr>
+          <a:xfrm>
+            <a:off x="2337206" y="4645152"/>
+            <a:ext cx="1909267" cy="216153"/>
+          </a:xfrm>
+          <a:prstGeom prst="rect">
+            <a:avLst/>
+          </a:prstGeom>
+          <a:noFill/>
+          <a:effectLst/>
+        </p:spPr>
+        <p:txBody>
+          <a:bodyPr wrap="none" lIns="18288" rIns="18288" tIns="18288" bIns="18288" anchor="t">
+            <a:spAutoFit/>
+          </a:bodyPr>
+          <a:lstStyle/>
+          <a:p>
+            <a:pPr algn="ctr">
+              <a:spcAft>
+                <a:spcPts val="0"/>
+              </a:spcAft>
+            </a:pPr>
+            <a:r>
+              <a:rPr sz="1100" b="0" i="0">
+                <a:solidFill>
+                  <a:srgbClr val="B4C7D2"/>
+                </a:solidFill>
+                <a:latin typeface="Arial"/>
+              </a:rPr>
+              <a:t>½ m_f v_f²</a:t>
+            </a:r>
+          </a:p>
+        </p:txBody>
+      </p:sp>
+      <p:sp>
+        <p:nvSpPr>
+          <p:cNvPr id="21" name="C4-E32 rect 19" descr="sci-ppt:o019"/>
+          <p:cNvSpPr/>
+          <p:nvPr/>
+        </p:nvSpPr>
+        <p:spPr>
+          <a:xfrm>
+            <a:off x="4501286" y="3120504"/>
+            <a:ext cx="1360627" cy="1451495"/>
+          </a:xfrm>
+          <a:prstGeom prst="rect">
+            <a:avLst/>
+          </a:prstGeom>
+          <a:solidFill>
+            <a:srgbClr val="F2B880">
+              <a:alpha val="85000"/>
+            </a:srgbClr>
+          </a:solidFill>
+          <a:ln w="12700">
+            <a:solidFill>
+              <a:srgbClr val="F2B880">
+                <a:alpha val="85000"/>
+              </a:srgbClr>
+            </a:solidFill>
+          </a:ln>
+          <a:effectLst/>
+        </p:spPr>
+        <p:txBody>
+          <a:bodyPr rtlCol="0" anchor="ctr"/>
+          <a:lstStyle/>
+          <a:p>
+            <a:pPr algn="ctr"/>
+          </a:p>
+        </p:txBody>
+      </p:sp>
+      <p:sp>
+        <p:nvSpPr>
+          <p:cNvPr id="22" name="C4-E32 text 20" descr="sci-ppt:o020"/>
+          <p:cNvSpPr txBox="1"/>
+          <p:nvPr/>
+        </p:nvSpPr>
+        <p:spPr>
+          <a:xfrm>
+            <a:off x="4272686" y="2846184"/>
+            <a:ext cx="1817827" cy="223900"/>
+          </a:xfrm>
+          <a:prstGeom prst="rect">
+            <a:avLst/>
+          </a:prstGeom>
+          <a:noFill/>
+          <a:effectLst/>
+        </p:spPr>
+        <p:txBody>
+          <a:bodyPr wrap="none" lIns="18288" rIns="18288" tIns="18288" bIns="18288" anchor="t">
+            <a:spAutoFit/>
+          </a:bodyPr>
+          <a:lstStyle/>
+          <a:p>
+            <a:pPr algn="ctr">
+              <a:spcAft>
+                <a:spcPts val="0"/>
+              </a:spcAft>
+            </a:pPr>
+            <a:r>
+              <a:rPr sz="1150" b="1" i="0">
+                <a:solidFill>
+                  <a:srgbClr val="E7F0F3"/>
+                </a:solidFill>
+                <a:latin typeface="Arial"/>
+              </a:rPr>
+              <a:t>5.291</a:t>
+            </a:r>
+          </a:p>
+        </p:txBody>
+      </p:sp>
+      <p:sp>
+        <p:nvSpPr>
+          <p:cNvPr id="23" name="C4-E32 text 21" descr="sci-ppt:o021"/>
+          <p:cNvSpPr txBox="1"/>
+          <p:nvPr/>
+        </p:nvSpPr>
+        <p:spPr>
+          <a:xfrm>
+            <a:off x="4226966" y="4645152"/>
+            <a:ext cx="1909267" cy="216153"/>
+          </a:xfrm>
+          <a:prstGeom prst="rect">
+            <a:avLst/>
+          </a:prstGeom>
+          <a:noFill/>
+          <a:effectLst/>
+        </p:spPr>
+        <p:txBody>
+          <a:bodyPr wrap="none" lIns="18288" rIns="18288" tIns="18288" bIns="18288" anchor="t">
+            <a:spAutoFit/>
+          </a:bodyPr>
+          <a:lstStyle/>
+          <a:p>
+            <a:pPr algn="ctr">
+              <a:spcAft>
+                <a:spcPts val="0"/>
+              </a:spcAft>
+            </a:pPr>
+            <a:r>
+              <a:rPr sz="1100" b="0" i="0">
+                <a:solidFill>
+                  <a:srgbClr val="B4C7D2"/>
+                </a:solidFill>
+                <a:latin typeface="Arial"/>
+              </a:rPr>
+              <a:t>= E_req</a:t>
+            </a:r>
+          </a:p>
+        </p:txBody>
+      </p:sp>
+      <p:sp>
+        <p:nvSpPr>
+          <p:cNvPr id="24" name="C4-E32 text 22" descr="sci-ppt:o022"/>
+          <p:cNvSpPr txBox="1"/>
+          <p:nvPr/>
+        </p:nvSpPr>
+        <p:spPr>
+          <a:xfrm>
+            <a:off x="6583680" y="960120"/>
+            <a:ext cx="5120640" cy="247142"/>
+          </a:xfrm>
+          <a:prstGeom prst="rect">
+            <a:avLst/>
+          </a:prstGeom>
+          <a:noFill/>
+          <a:effectLst/>
+        </p:spPr>
+        <p:txBody>
+          <a:bodyPr wrap="none" lIns="18288" rIns="18288" tIns="18288" bIns="18288" anchor="t">
             <a:spAutoFit/>
           </a:bodyPr>
           <a:lstStyle/>
@@ -3491,27 +3849,651 @@
               </a:spcAft>
             </a:pPr>
             <a:r>
-              <a:rPr sz="1150" b="0" i="0">
+              <a:rPr sz="1300" b="1" i="0">
+                <a:solidFill>
+                  <a:srgbClr val="8EDBD4"/>
+                </a:solidFill>
+                <a:latin typeface="Arial"/>
+              </a:rPr>
+              <a:t>Energy budget (nJ)</a:t>
+            </a:r>
+          </a:p>
+        </p:txBody>
+      </p:sp>
+      <p:sp>
+        <p:nvSpPr>
+          <p:cNvPr id="25" name="C4-E32 text 23" descr="sci-ppt:o023"/>
+          <p:cNvSpPr txBox="1"/>
+          <p:nvPr/>
+        </p:nvSpPr>
+        <p:spPr>
+          <a:xfrm>
+            <a:off x="6583680" y="1572768"/>
+            <a:ext cx="1737360" cy="231648"/>
+          </a:xfrm>
+          <a:prstGeom prst="rect">
+            <a:avLst/>
+          </a:prstGeom>
+          <a:noFill/>
+          <a:effectLst/>
+        </p:spPr>
+        <p:txBody>
+          <a:bodyPr wrap="none" lIns="18288" rIns="18288" tIns="18288" bIns="18288" anchor="t">
+            <a:spAutoFit/>
+          </a:bodyPr>
+          <a:lstStyle/>
+          <a:p>
+            <a:pPr algn="l">
+              <a:spcAft>
+                <a:spcPts val="0"/>
+              </a:spcAft>
+            </a:pPr>
+            <a:r>
+              <a:rPr sz="1200" b="0" i="0">
+                <a:solidFill>
+                  <a:srgbClr val="E7F0F3"/>
+                </a:solidFill>
+                <a:latin typeface="Arial"/>
+              </a:rPr>
+              <a:t>E_req(0.50 m/s)</a:t>
+            </a:r>
+          </a:p>
+        </p:txBody>
+      </p:sp>
+      <p:sp>
+        <p:nvSpPr>
+          <p:cNvPr id="26" name="C4-E32 rect 24" descr="sci-ppt:o024"/>
+          <p:cNvSpPr/>
+          <p:nvPr/>
+        </p:nvSpPr>
+        <p:spPr>
+          <a:xfrm>
+            <a:off x="8412480" y="1554480"/>
+            <a:ext cx="967663" cy="457200"/>
+          </a:xfrm>
+          <a:prstGeom prst="rect">
+            <a:avLst/>
+          </a:prstGeom>
+          <a:solidFill>
+            <a:srgbClr val="F2B880">
+              <a:alpha val="85000"/>
+            </a:srgbClr>
+          </a:solidFill>
+          <a:ln w="12700">
+            <a:solidFill>
+              <a:srgbClr val="F2B880">
+                <a:alpha val="85000"/>
+              </a:srgbClr>
+            </a:solidFill>
+          </a:ln>
+          <a:effectLst/>
+        </p:spPr>
+        <p:txBody>
+          <a:bodyPr rtlCol="0" anchor="ctr"/>
+          <a:lstStyle/>
+          <a:p>
+            <a:pPr algn="ctr"/>
+          </a:p>
+        </p:txBody>
+      </p:sp>
+      <p:sp>
+        <p:nvSpPr>
+          <p:cNvPr id="27" name="C4-E32 text 25" descr="sci-ppt:o025"/>
+          <p:cNvSpPr txBox="1"/>
+          <p:nvPr/>
+        </p:nvSpPr>
+        <p:spPr>
+          <a:xfrm>
+            <a:off x="9453295" y="1600200"/>
+            <a:ext cx="1371600" cy="231648"/>
+          </a:xfrm>
+          <a:prstGeom prst="rect">
+            <a:avLst/>
+          </a:prstGeom>
+          <a:noFill/>
+          <a:effectLst/>
+        </p:spPr>
+        <p:txBody>
+          <a:bodyPr wrap="none" lIns="18288" rIns="18288" tIns="18288" bIns="18288" anchor="t">
+            <a:spAutoFit/>
+          </a:bodyPr>
+          <a:lstStyle/>
+          <a:p>
+            <a:pPr algn="l">
+              <a:spcAft>
+                <a:spcPts val="0"/>
+              </a:spcAft>
+            </a:pPr>
+            <a:r>
+              <a:rPr sz="1200" b="1" i="0">
+                <a:solidFill>
+                  <a:srgbClr val="E7F0F3"/>
+                </a:solidFill>
+                <a:latin typeface="Arial"/>
+              </a:rPr>
+              <a:t>5.291 nJ</a:t>
+            </a:r>
+          </a:p>
+        </p:txBody>
+      </p:sp>
+      <p:sp>
+        <p:nvSpPr>
+          <p:cNvPr id="28" name="C4-E32 text 26" descr="sci-ppt:o026"/>
+          <p:cNvSpPr txBox="1"/>
+          <p:nvPr/>
+        </p:nvSpPr>
+        <p:spPr>
+          <a:xfrm>
+            <a:off x="6583680" y="2304288"/>
+            <a:ext cx="1737360" cy="231648"/>
+          </a:xfrm>
+          <a:prstGeom prst="rect">
+            <a:avLst/>
+          </a:prstGeom>
+          <a:noFill/>
+          <a:effectLst/>
+        </p:spPr>
+        <p:txBody>
+          <a:bodyPr wrap="none" lIns="18288" rIns="18288" tIns="18288" bIns="18288" anchor="t">
+            <a:spAutoFit/>
+          </a:bodyPr>
+          <a:lstStyle/>
+          <a:p>
+            <a:pPr algn="l">
+              <a:spcAft>
+                <a:spcPts val="0"/>
+              </a:spcAft>
+            </a:pPr>
+            <a:r>
+              <a:rPr sz="1200" b="0" i="0">
+                <a:solidFill>
+                  <a:srgbClr val="E7F0F3"/>
+                </a:solidFill>
+                <a:latin typeface="Arial"/>
+              </a:rPr>
+              <a:t>E_solid</a:t>
+            </a:r>
+          </a:p>
+        </p:txBody>
+      </p:sp>
+      <p:sp>
+        <p:nvSpPr>
+          <p:cNvPr id="29" name="C4-E32 rect 27" descr="sci-ppt:o027"/>
+          <p:cNvSpPr/>
+          <p:nvPr/>
+        </p:nvSpPr>
+        <p:spPr>
+          <a:xfrm>
+            <a:off x="8412480" y="2286000"/>
+            <a:ext cx="1828799" cy="457200"/>
+          </a:xfrm>
+          <a:prstGeom prst="rect">
+            <a:avLst/>
+          </a:prstGeom>
+          <a:solidFill>
+            <a:srgbClr val="8EDBD4">
+              <a:alpha val="85000"/>
+            </a:srgbClr>
+          </a:solidFill>
+          <a:ln w="12700">
+            <a:solidFill>
+              <a:srgbClr val="8EDBD4">
+                <a:alpha val="85000"/>
+              </a:srgbClr>
+            </a:solidFill>
+          </a:ln>
+          <a:effectLst/>
+        </p:spPr>
+        <p:txBody>
+          <a:bodyPr rtlCol="0" anchor="ctr"/>
+          <a:lstStyle/>
+          <a:p>
+            <a:pPr algn="ctr"/>
+          </a:p>
+        </p:txBody>
+      </p:sp>
+      <p:sp>
+        <p:nvSpPr>
+          <p:cNvPr id="30" name="C4-E32 text 28" descr="sci-ppt:o028"/>
+          <p:cNvSpPr txBox="1"/>
+          <p:nvPr/>
+        </p:nvSpPr>
+        <p:spPr>
+          <a:xfrm>
+            <a:off x="10314432" y="2331720"/>
+            <a:ext cx="1371600" cy="231648"/>
+          </a:xfrm>
+          <a:prstGeom prst="rect">
+            <a:avLst/>
+          </a:prstGeom>
+          <a:noFill/>
+          <a:effectLst/>
+        </p:spPr>
+        <p:txBody>
+          <a:bodyPr wrap="none" lIns="18288" rIns="18288" tIns="18288" bIns="18288" anchor="t">
+            <a:spAutoFit/>
+          </a:bodyPr>
+          <a:lstStyle/>
+          <a:p>
+            <a:pPr algn="l">
+              <a:spcAft>
+                <a:spcPts val="0"/>
+              </a:spcAft>
+            </a:pPr>
+            <a:r>
+              <a:rPr sz="1200" b="1" i="0">
+                <a:solidFill>
+                  <a:srgbClr val="E7F0F3"/>
+                </a:solidFill>
+                <a:latin typeface="Arial"/>
+              </a:rPr>
+              <a:t>10.000 nJ</a:t>
+            </a:r>
+          </a:p>
+        </p:txBody>
+      </p:sp>
+      <p:sp>
+        <p:nvSpPr>
+          <p:cNvPr id="31" name="C4-E32 text 29" descr="sci-ppt:o029"/>
+          <p:cNvSpPr txBox="1"/>
+          <p:nvPr/>
+        </p:nvSpPr>
+        <p:spPr>
+          <a:xfrm>
+            <a:off x="6583680" y="3200400"/>
+            <a:ext cx="5120640" cy="247142"/>
+          </a:xfrm>
+          <a:prstGeom prst="rect">
+            <a:avLst/>
+          </a:prstGeom>
+          <a:noFill/>
+          <a:effectLst/>
+        </p:spPr>
+        <p:txBody>
+          <a:bodyPr wrap="none" lIns="18288" rIns="18288" tIns="18288" bIns="18288" anchor="t">
+            <a:spAutoFit/>
+          </a:bodyPr>
+          <a:lstStyle/>
+          <a:p>
+            <a:pPr algn="l">
+              <a:spcAft>
+                <a:spcPts val="0"/>
+              </a:spcAft>
+            </a:pPr>
+            <a:r>
+              <a:rPr sz="1300" b="1" i="0">
+                <a:solidFill>
+                  <a:srgbClr val="8EDBD4"/>
+                </a:solidFill>
+                <a:latin typeface="Arial"/>
+              </a:rPr>
+              <a:t>Impulse budget (nN s)</a:t>
+            </a:r>
+          </a:p>
+        </p:txBody>
+      </p:sp>
+      <p:sp>
+        <p:nvSpPr>
+          <p:cNvPr id="32" name="C4-E32 text 30" descr="sci-ppt:o030"/>
+          <p:cNvSpPr txBox="1"/>
+          <p:nvPr/>
+        </p:nvSpPr>
+        <p:spPr>
+          <a:xfrm>
+            <a:off x="6583680" y="3675887"/>
+            <a:ext cx="1737360" cy="231648"/>
+          </a:xfrm>
+          <a:prstGeom prst="rect">
+            <a:avLst/>
+          </a:prstGeom>
+          <a:noFill/>
+          <a:effectLst/>
+        </p:spPr>
+        <p:txBody>
+          <a:bodyPr wrap="none" lIns="18288" rIns="18288" tIns="18288" bIns="18288" anchor="t">
+            <a:spAutoFit/>
+          </a:bodyPr>
+          <a:lstStyle/>
+          <a:p>
+            <a:pPr algn="l">
+              <a:spcAft>
+                <a:spcPts val="0"/>
+              </a:spcAft>
+            </a:pPr>
+            <a:r>
+              <a:rPr sz="1200" b="0" i="0">
+                <a:solidFill>
+                  <a:srgbClr val="E7F0F3"/>
+                </a:solidFill>
+                <a:latin typeface="Arial"/>
+              </a:rPr>
+              <a:t>I_req</a:t>
+            </a:r>
+          </a:p>
+        </p:txBody>
+      </p:sp>
+      <p:sp>
+        <p:nvSpPr>
+          <p:cNvPr id="33" name="C4-E32 rect 31" descr="sci-ppt:o031"/>
+          <p:cNvSpPr/>
+          <p:nvPr/>
+        </p:nvSpPr>
+        <p:spPr>
+          <a:xfrm>
+            <a:off x="8412480" y="3657600"/>
+            <a:ext cx="1302003" cy="457200"/>
+          </a:xfrm>
+          <a:prstGeom prst="rect">
+            <a:avLst/>
+          </a:prstGeom>
+          <a:solidFill>
+            <a:srgbClr val="F2B880">
+              <a:alpha val="85000"/>
+            </a:srgbClr>
+          </a:solidFill>
+          <a:ln w="12700">
+            <a:solidFill>
+              <a:srgbClr val="F2B880">
+                <a:alpha val="85000"/>
+              </a:srgbClr>
+            </a:solidFill>
+          </a:ln>
+          <a:effectLst/>
+        </p:spPr>
+        <p:txBody>
+          <a:bodyPr rtlCol="0" anchor="ctr"/>
+          <a:lstStyle/>
+          <a:p>
+            <a:pPr algn="ctr"/>
+          </a:p>
+        </p:txBody>
+      </p:sp>
+      <p:sp>
+        <p:nvSpPr>
+          <p:cNvPr id="34" name="C4-E32 text 32" descr="sci-ppt:o032"/>
+          <p:cNvSpPr txBox="1"/>
+          <p:nvPr/>
+        </p:nvSpPr>
+        <p:spPr>
+          <a:xfrm>
+            <a:off x="9787636" y="3703320"/>
+            <a:ext cx="1371600" cy="231648"/>
+          </a:xfrm>
+          <a:prstGeom prst="rect">
+            <a:avLst/>
+          </a:prstGeom>
+          <a:noFill/>
+          <a:effectLst/>
+        </p:spPr>
+        <p:txBody>
+          <a:bodyPr wrap="none" lIns="18288" rIns="18288" tIns="18288" bIns="18288" anchor="t">
+            <a:spAutoFit/>
+          </a:bodyPr>
+          <a:lstStyle/>
+          <a:p>
+            <a:pPr algn="l">
+              <a:spcAft>
+                <a:spcPts val="0"/>
+              </a:spcAft>
+            </a:pPr>
+            <a:r>
+              <a:rPr sz="1200" b="1" i="0">
+                <a:solidFill>
+                  <a:srgbClr val="E7F0F3"/>
+                </a:solidFill>
+                <a:latin typeface="Arial"/>
+              </a:rPr>
+              <a:t>1.165 nN s</a:t>
+            </a:r>
+          </a:p>
+        </p:txBody>
+      </p:sp>
+      <p:sp>
+        <p:nvSpPr>
+          <p:cNvPr id="35" name="C4-E32 text 33" descr="sci-ppt:o033"/>
+          <p:cNvSpPr txBox="1"/>
+          <p:nvPr/>
+        </p:nvSpPr>
+        <p:spPr>
+          <a:xfrm>
+            <a:off x="6583680" y="4407407"/>
+            <a:ext cx="1737360" cy="231648"/>
+          </a:xfrm>
+          <a:prstGeom prst="rect">
+            <a:avLst/>
+          </a:prstGeom>
+          <a:noFill/>
+          <a:effectLst/>
+        </p:spPr>
+        <p:txBody>
+          <a:bodyPr wrap="none" lIns="18288" rIns="18288" tIns="18288" bIns="18288" anchor="t">
+            <a:spAutoFit/>
+          </a:bodyPr>
+          <a:lstStyle/>
+          <a:p>
+            <a:pPr algn="l">
+              <a:spcAft>
+                <a:spcPts val="0"/>
+              </a:spcAft>
+            </a:pPr>
+            <a:r>
+              <a:rPr sz="1200" b="0" i="0">
+                <a:solidFill>
+                  <a:srgbClr val="E7F0F3"/>
+                </a:solidFill>
+                <a:latin typeface="Arial"/>
+              </a:rPr>
+              <a:t>Iₙₑₜ</a:t>
+            </a:r>
+          </a:p>
+        </p:txBody>
+      </p:sp>
+      <p:sp>
+        <p:nvSpPr>
+          <p:cNvPr id="36" name="C4-E32 rect 34" descr="sci-ppt:o034"/>
+          <p:cNvSpPr/>
+          <p:nvPr/>
+        </p:nvSpPr>
+        <p:spPr>
+          <a:xfrm>
+            <a:off x="8412480" y="4389120"/>
+            <a:ext cx="1750879" cy="457200"/>
+          </a:xfrm>
+          <a:prstGeom prst="rect">
+            <a:avLst/>
+          </a:prstGeom>
+          <a:solidFill>
+            <a:srgbClr val="8EDBD4">
+              <a:alpha val="85000"/>
+            </a:srgbClr>
+          </a:solidFill>
+          <a:ln w="12700">
+            <a:solidFill>
+              <a:srgbClr val="8EDBD4">
+                <a:alpha val="85000"/>
+              </a:srgbClr>
+            </a:solidFill>
+          </a:ln>
+          <a:effectLst/>
+        </p:spPr>
+        <p:txBody>
+          <a:bodyPr rtlCol="0" anchor="ctr"/>
+          <a:lstStyle/>
+          <a:p>
+            <a:pPr algn="ctr"/>
+          </a:p>
+        </p:txBody>
+      </p:sp>
+      <p:sp>
+        <p:nvSpPr>
+          <p:cNvPr id="37" name="C4-E32 text 35" descr="sci-ppt:o035"/>
+          <p:cNvSpPr txBox="1"/>
+          <p:nvPr/>
+        </p:nvSpPr>
+        <p:spPr>
+          <a:xfrm>
+            <a:off x="10236511" y="4434840"/>
+            <a:ext cx="1371600" cy="231648"/>
+          </a:xfrm>
+          <a:prstGeom prst="rect">
+            <a:avLst/>
+          </a:prstGeom>
+          <a:noFill/>
+          <a:effectLst/>
+        </p:spPr>
+        <p:txBody>
+          <a:bodyPr wrap="none" lIns="18288" rIns="18288" tIns="18288" bIns="18288" anchor="t">
+            <a:spAutoFit/>
+          </a:bodyPr>
+          <a:lstStyle/>
+          <a:p>
+            <a:pPr algn="l">
+              <a:spcAft>
+                <a:spcPts val="0"/>
+              </a:spcAft>
+            </a:pPr>
+            <a:r>
+              <a:rPr sz="1200" b="1" i="0">
+                <a:solidFill>
+                  <a:srgbClr val="E7F0F3"/>
+                </a:solidFill>
+                <a:latin typeface="Arial"/>
+              </a:rPr>
+              <a:t>1.567 nN s</a:t>
+            </a:r>
+          </a:p>
+        </p:txBody>
+      </p:sp>
+      <p:sp>
+        <p:nvSpPr>
+          <p:cNvPr id="38" name="C4-E32 text 36" descr="sci-ppt:o036"/>
+          <p:cNvSpPr txBox="1"/>
+          <p:nvPr/>
+        </p:nvSpPr>
+        <p:spPr>
+          <a:xfrm>
+            <a:off x="457200" y="4846320"/>
+            <a:ext cx="11247120" cy="247142"/>
+          </a:xfrm>
+          <a:prstGeom prst="rect">
+            <a:avLst/>
+          </a:prstGeom>
+          <a:noFill/>
+          <a:effectLst/>
+        </p:spPr>
+        <p:txBody>
+          <a:bodyPr wrap="none" lIns="18288" rIns="18288" tIns="18288" bIns="18288" anchor="t">
+            <a:spAutoFit/>
+          </a:bodyPr>
+          <a:lstStyle/>
+          <a:p>
+            <a:pPr algn="l">
+              <a:spcAft>
+                <a:spcPts val="0"/>
+              </a:spcAft>
+            </a:pPr>
+            <a:r>
+              <a:rPr sz="1300" b="1" i="0">
+                <a:solidFill>
+                  <a:srgbClr val="F2B880"/>
+                </a:solidFill>
+                <a:latin typeface="Arial"/>
+              </a:rPr>
+              <a:t>E_req(0.50 m/s) = 5.00 + 0.29125 = 5.29125 nJ  &lt;  E_solid = 10.0 nJ</a:t>
+            </a:r>
+          </a:p>
+        </p:txBody>
+      </p:sp>
+      <p:sp>
+        <p:nvSpPr>
+          <p:cNvPr id="39" name="C4-E32 text 37" descr="sci-ppt:o037"/>
+          <p:cNvSpPr txBox="1"/>
+          <p:nvPr/>
+        </p:nvSpPr>
+        <p:spPr>
+          <a:xfrm>
+            <a:off x="457200" y="5349240"/>
+            <a:ext cx="11247120" cy="247142"/>
+          </a:xfrm>
+          <a:prstGeom prst="rect">
+            <a:avLst/>
+          </a:prstGeom>
+          <a:noFill/>
+          <a:effectLst/>
+        </p:spPr>
+        <p:txBody>
+          <a:bodyPr wrap="none" lIns="18288" rIns="18288" tIns="18288" bIns="18288" anchor="t">
+            <a:spAutoFit/>
+          </a:bodyPr>
+          <a:lstStyle/>
+          <a:p>
+            <a:pPr algn="l">
+              <a:spcAft>
+                <a:spcPts val="0"/>
+              </a:spcAft>
+            </a:pPr>
+            <a:r>
+              <a:rPr sz="1300" b="1" i="0">
+                <a:solidFill>
+                  <a:srgbClr val="E7F0F3"/>
+                </a:solidFill>
+                <a:latin typeface="Arial"/>
+              </a:rPr>
+              <a:t>I_req = m_f v_f = (2.33×10⁻⁹)(0.50) = 1.165e-09 N s  &lt;  Iₙₑₜ = 1.567e-09 N s</a:t>
+            </a:r>
+          </a:p>
+        </p:txBody>
+      </p:sp>
+      <p:sp>
+        <p:nvSpPr>
+          <p:cNvPr id="40" name="C4-E32 text 38" descr="sci-ppt:o038"/>
+          <p:cNvSpPr txBox="1"/>
+          <p:nvPr/>
+        </p:nvSpPr>
+        <p:spPr>
+          <a:xfrm>
+            <a:off x="457200" y="5897880"/>
+            <a:ext cx="11247120" cy="239395"/>
+          </a:xfrm>
+          <a:prstGeom prst="rect">
+            <a:avLst/>
+          </a:prstGeom>
+          <a:noFill/>
+          <a:effectLst/>
+        </p:spPr>
+        <p:txBody>
+          <a:bodyPr wrap="none" lIns="18288" rIns="18288" tIns="18288" bIns="18288" anchor="t">
+            <a:spAutoFit/>
+          </a:bodyPr>
+          <a:lstStyle/>
+          <a:p>
+            <a:pPr algn="l">
+              <a:spcAft>
+                <a:spcPts val="0"/>
+              </a:spcAft>
+            </a:pPr>
+            <a:r>
+              <a:rPr sz="1250" b="0" i="0">
                 <a:solidFill>
                   <a:srgbClr val="B4C7D2"/>
                 </a:solidFill>
                 <a:latin typeface="Arial"/>
               </a:rPr>
-              <a:t>• ΓA_f = 5 nJ — release</a:t>
-            </a:r>
-          </a:p>
-        </p:txBody>
-      </p:sp>
-      <p:sp>
-        <p:nvSpPr>
-          <p:cNvPr id="14" name="C4-E32 text 12" descr="sci-ppt:o012"/>
+              <a:t>Both necessary budgets pass; success is still not established.</a:t>
+            </a:r>
+          </a:p>
+        </p:txBody>
+      </p:sp>
+      <p:sp>
+        <p:nvSpPr>
+          <p:cNvPr id="41" name="C4-E32 text 39" descr="sci-ppt:o039"/>
           <p:cNvSpPr txBox="1"/>
           <p:nvPr/>
         </p:nvSpPr>
         <p:spPr>
           <a:xfrm>
-            <a:off x="6217920" y="4096512"/>
-            <a:ext cx="5715000" cy="246888"/>
+            <a:off x="320040" y="6510528"/>
+            <a:ext cx="11521440" cy="200660"/>
           </a:xfrm>
           <a:prstGeom prst="rect">
             <a:avLst/>
@@ -3520,207 +4502,7 @@
           <a:effectLst/>
         </p:spPr>
         <p:txBody>
-          <a:bodyPr wrap="square" lIns="27432" rIns="27432" tIns="18288" bIns="18288" anchor="ctr">
-            <a:spAutoFit/>
-          </a:bodyPr>
-          <a:lstStyle/>
-          <a:p>
-            <a:pPr algn="l">
-              <a:spcAft>
-                <a:spcPts val="0"/>
-              </a:spcAft>
-            </a:pPr>
-            <a:r>
-              <a:rPr sz="1150" b="0" i="0">
-                <a:solidFill>
-                  <a:srgbClr val="B4C7D2"/>
-                </a:solidFill>
-                <a:latin typeface="Arial"/>
-              </a:rPr>
-              <a:t>• ½m_f v_f² = 0.29125 nJ — minimum translation</a:t>
-            </a:r>
-          </a:p>
-        </p:txBody>
-      </p:sp>
-      <p:sp>
-        <p:nvSpPr>
-          <p:cNvPr id="15" name="C4-E32 text 13" descr="sci-ppt:o013"/>
-          <p:cNvSpPr txBox="1"/>
-          <p:nvPr/>
-        </p:nvSpPr>
-        <p:spPr>
-          <a:xfrm>
-            <a:off x="320040" y="4329684"/>
-            <a:ext cx="5715000" cy="246888"/>
-          </a:xfrm>
-          <a:prstGeom prst="rect">
-            <a:avLst/>
-          </a:prstGeom>
-          <a:noFill/>
-          <a:effectLst/>
-        </p:spPr>
-        <p:txBody>
-          <a:bodyPr wrap="square" lIns="27432" rIns="27432" tIns="18288" bIns="18288" anchor="ctr">
-            <a:spAutoFit/>
-          </a:bodyPr>
-          <a:lstStyle/>
-          <a:p>
-            <a:pPr algn="l">
-              <a:spcAft>
-                <a:spcPts val="0"/>
-              </a:spcAft>
-            </a:pPr>
-            <a:r>
-              <a:rPr sz="1150" b="0" i="0">
-                <a:solidFill>
-                  <a:srgbClr val="B4C7D2"/>
-                </a:solidFill>
-                <a:latin typeface="Arial"/>
-              </a:rPr>
-              <a:t>• E_req = 5.29125 nJ &lt; E_solid</a:t>
-            </a:r>
-          </a:p>
-        </p:txBody>
-      </p:sp>
-      <p:sp>
-        <p:nvSpPr>
-          <p:cNvPr id="16" name="C4-E32 text 14" descr="sci-ppt:o014"/>
-          <p:cNvSpPr txBox="1"/>
-          <p:nvPr/>
-        </p:nvSpPr>
-        <p:spPr>
-          <a:xfrm>
-            <a:off x="6217920" y="4329684"/>
-            <a:ext cx="5715000" cy="246888"/>
-          </a:xfrm>
-          <a:prstGeom prst="rect">
-            <a:avLst/>
-          </a:prstGeom>
-          <a:noFill/>
-          <a:effectLst/>
-        </p:spPr>
-        <p:txBody>
-          <a:bodyPr wrap="square" lIns="27432" rIns="27432" tIns="18288" bIns="18288" anchor="ctr">
-            <a:spAutoFit/>
-          </a:bodyPr>
-          <a:lstStyle/>
-          <a:p>
-            <a:pPr algn="l">
-              <a:spcAft>
-                <a:spcPts val="0"/>
-              </a:spcAft>
-            </a:pPr>
-            <a:r>
-              <a:rPr sz="1150" b="0" i="0">
-                <a:solidFill>
-                  <a:srgbClr val="B4C7D2"/>
-                </a:solidFill>
-                <a:latin typeface="Arial"/>
-              </a:rPr>
-              <a:t>• I_req = 1.165×10⁻⁹ N s &lt; I_net</a:t>
-            </a:r>
-          </a:p>
-        </p:txBody>
-      </p:sp>
-      <p:sp>
-        <p:nvSpPr>
-          <p:cNvPr id="17" name="C4-E32 text 15" descr="sci-ppt:o015"/>
-          <p:cNvSpPr txBox="1"/>
-          <p:nvPr/>
-        </p:nvSpPr>
-        <p:spPr>
-          <a:xfrm>
-            <a:off x="320040" y="4562856"/>
-            <a:ext cx="5715000" cy="246888"/>
-          </a:xfrm>
-          <a:prstGeom prst="rect">
-            <a:avLst/>
-          </a:prstGeom>
-          <a:noFill/>
-          <a:effectLst/>
-        </p:spPr>
-        <p:txBody>
-          <a:bodyPr wrap="square" lIns="27432" rIns="27432" tIns="18288" bIns="18288" anchor="ctr">
-            <a:spAutoFit/>
-          </a:bodyPr>
-          <a:lstStyle/>
-          <a:p>
-            <a:pPr algn="l">
-              <a:spcAft>
-                <a:spcPts val="0"/>
-              </a:spcAft>
-            </a:pPr>
-            <a:r>
-              <a:rPr sz="1150" b="0" i="0">
-                <a:solidFill>
-                  <a:srgbClr val="B4C7D2"/>
-                </a:solidFill>
-                <a:latin typeface="Arial"/>
-              </a:rPr>
-              <a:t>• v_f = 0.50 m/s — required minimum</a:t>
-            </a:r>
-          </a:p>
-        </p:txBody>
-      </p:sp>
-      <p:sp>
-        <p:nvSpPr>
-          <p:cNvPr id="18" name="C4-E32 text 16" descr="sci-ppt:o016"/>
-          <p:cNvSpPr txBox="1"/>
-          <p:nvPr/>
-        </p:nvSpPr>
-        <p:spPr>
-          <a:xfrm>
-            <a:off x="320040" y="5596128"/>
-            <a:ext cx="11430000" cy="292608"/>
-          </a:xfrm>
-          <a:prstGeom prst="rect">
-            <a:avLst/>
-          </a:prstGeom>
-          <a:noFill/>
-          <a:effectLst/>
-        </p:spPr>
-        <p:txBody>
-          <a:bodyPr wrap="square" lIns="27432" rIns="27432" tIns="18288" bIns="18288" anchor="ctr">
-            <a:spAutoFit/>
-          </a:bodyPr>
-          <a:lstStyle/>
-          <a:p>
-            <a:pPr algn="l">
-              <a:spcAft>
-                <a:spcPts val="0"/>
-              </a:spcAft>
-            </a:pPr>
-            <a:r>
-              <a:rPr sz="1150" b="0" i="0">
-                <a:solidFill>
-                  <a:srgbClr val="8EDBD4"/>
-                </a:solidFill>
-                <a:latin typeface="Arial"/>
-              </a:rPr>
-              <a:t>Spatial crack completion and intactness remain unproved.</a:t>
-            </a:r>
-          </a:p>
-        </p:txBody>
-      </p:sp>
-      <p:sp>
-        <p:nvSpPr>
-          <p:cNvPr id="19" name="C4-E32 text 17" descr="sci-ppt:o017"/>
-          <p:cNvSpPr txBox="1"/>
-          <p:nvPr/>
-        </p:nvSpPr>
-        <p:spPr>
-          <a:xfrm>
-            <a:off x="320040" y="6473952"/>
-            <a:ext cx="11430000" cy="256032"/>
-          </a:xfrm>
-          <a:prstGeom prst="rect">
-            <a:avLst/>
-          </a:prstGeom>
-          <a:noFill/>
-          <a:effectLst/>
-        </p:spPr>
-        <p:txBody>
-          <a:bodyPr wrap="square" lIns="27432" rIns="27432" tIns="18288" bIns="18288" anchor="ctr">
+          <a:bodyPr wrap="none" lIns="18288" rIns="18288" tIns="18288" bIns="18288" anchor="t">
             <a:spAutoFit/>
           </a:bodyPr>
           <a:lstStyle/>
@@ -3737,7 +4519,7 @@
                 </a:solidFill>
                 <a:latin typeface="Arial"/>
               </a:rPr>
-              <a:t>Model schematic; geometry is not to scale.</a:t>
+              <a:t>Passed screens of Eq. C4-E32.</a:t>
             </a:r>
           </a:p>
         </p:txBody>
